--- a/site/public/slides/ttl-day2-active-beats-passive.pptx
+++ b/site/public/slides/ttl-day2-active-beats-passive.pptx
@@ -1994,7 +1994,7 @@
           <a:p>
             <a:fld id="{5BCAD085-E8A6-8845-BD4E-CB4CCA059FC4}" type="datetimeFigureOut">
               <a:rPr lang="en-US" smtClean="0"/>
-              <a:t>10/2/26</a:t>
+              <a:t>10/6/26</a:t>
             </a:fld>
             <a:endParaRPr lang="en-US"/>
           </a:p>
@@ -2162,7 +2162,7 @@
           <a:p>
             <a:fld id="{5BCAD085-E8A6-8845-BD4E-CB4CCA059FC4}" type="datetimeFigureOut">
               <a:rPr lang="en-US" smtClean="0"/>
-              <a:t>10/2/26</a:t>
+              <a:t>10/6/26</a:t>
             </a:fld>
             <a:endParaRPr lang="en-US"/>
           </a:p>
@@ -2340,7 +2340,7 @@
           <a:p>
             <a:fld id="{5BCAD085-E8A6-8845-BD4E-CB4CCA059FC4}" type="datetimeFigureOut">
               <a:rPr lang="en-US" smtClean="0"/>
-              <a:t>10/2/26</a:t>
+              <a:t>10/6/26</a:t>
             </a:fld>
             <a:endParaRPr lang="en-US"/>
           </a:p>
@@ -2508,7 +2508,7 @@
           <a:p>
             <a:fld id="{5BCAD085-E8A6-8845-BD4E-CB4CCA059FC4}" type="datetimeFigureOut">
               <a:rPr lang="en-US" smtClean="0"/>
-              <a:t>10/2/26</a:t>
+              <a:t>10/6/26</a:t>
             </a:fld>
             <a:endParaRPr lang="en-US"/>
           </a:p>
@@ -2753,7 +2753,7 @@
           <a:p>
             <a:fld id="{5BCAD085-E8A6-8845-BD4E-CB4CCA059FC4}" type="datetimeFigureOut">
               <a:rPr lang="en-US" smtClean="0"/>
-              <a:t>10/2/26</a:t>
+              <a:t>10/6/26</a:t>
             </a:fld>
             <a:endParaRPr lang="en-US"/>
           </a:p>
@@ -3038,7 +3038,7 @@
           <a:p>
             <a:fld id="{5BCAD085-E8A6-8845-BD4E-CB4CCA059FC4}" type="datetimeFigureOut">
               <a:rPr lang="en-US" smtClean="0"/>
-              <a:t>10/2/26</a:t>
+              <a:t>10/6/26</a:t>
             </a:fld>
             <a:endParaRPr lang="en-US"/>
           </a:p>
@@ -3457,7 +3457,7 @@
           <a:p>
             <a:fld id="{5BCAD085-E8A6-8845-BD4E-CB4CCA059FC4}" type="datetimeFigureOut">
               <a:rPr lang="en-US" smtClean="0"/>
-              <a:t>10/2/26</a:t>
+              <a:t>10/6/26</a:t>
             </a:fld>
             <a:endParaRPr lang="en-US"/>
           </a:p>
@@ -3574,7 +3574,7 @@
           <a:p>
             <a:fld id="{5BCAD085-E8A6-8845-BD4E-CB4CCA059FC4}" type="datetimeFigureOut">
               <a:rPr lang="en-US" smtClean="0"/>
-              <a:t>10/2/26</a:t>
+              <a:t>10/6/26</a:t>
             </a:fld>
             <a:endParaRPr lang="en-US"/>
           </a:p>
@@ -3669,7 +3669,7 @@
           <a:p>
             <a:fld id="{5BCAD085-E8A6-8845-BD4E-CB4CCA059FC4}" type="datetimeFigureOut">
               <a:rPr lang="en-US" smtClean="0"/>
-              <a:t>10/2/26</a:t>
+              <a:t>10/6/26</a:t>
             </a:fld>
             <a:endParaRPr lang="en-US"/>
           </a:p>
@@ -3944,7 +3944,7 @@
           <a:p>
             <a:fld id="{5BCAD085-E8A6-8845-BD4E-CB4CCA059FC4}" type="datetimeFigureOut">
               <a:rPr lang="en-US" smtClean="0"/>
-              <a:t>10/2/26</a:t>
+              <a:t>10/6/26</a:t>
             </a:fld>
             <a:endParaRPr lang="en-US"/>
           </a:p>
@@ -4196,7 +4196,7 @@
           <a:p>
             <a:fld id="{5BCAD085-E8A6-8845-BD4E-CB4CCA059FC4}" type="datetimeFigureOut">
               <a:rPr lang="en-US" smtClean="0"/>
-              <a:t>10/2/26</a:t>
+              <a:t>10/6/26</a:t>
             </a:fld>
             <a:endParaRPr lang="en-US"/>
           </a:p>
@@ -4407,7 +4407,7 @@
           <a:p>
             <a:fld id="{5BCAD085-E8A6-8845-BD4E-CB4CCA059FC4}" type="datetimeFigureOut">
               <a:rPr lang="en-US" smtClean="0"/>
-              <a:t>10/2/26</a:t>
+              <a:t>10/6/26</a:t>
             </a:fld>
             <a:endParaRPr lang="en-US"/>
           </a:p>
@@ -4957,13 +4957,7 @@
                   <a:srgbClr val="B24200"/>
                 </a:solidFill>
                 <a:latin typeface="Aptos"/>
-                <a:hlinkClick r:id="rId4">
-                  <a:extLst>
-                    <a:ext uri="{A12FA001-AC4F-418D-AE19-62706E023703}">
-                      <ahyp:hlinkClr xmlns:ahyp="http://schemas.microsoft.com/office/drawing/2018/hyperlinkcolor" val="tx"/>
-                    </a:ext>
-                  </a:extLst>
-                </a:hlinkClick>
+                <a:hlinkClick r:id="rId4"/>
               </a:rPr>
               <a:t>https://teachingthatlands.uk/</a:t>
             </a:r>
@@ -6505,15 +6499,6 @@
                 <a:latin typeface="Georgia"/>
               </a:rPr>
               <a:t>Next week: did it land?</a:t>
-            </a:r>
-            <a:r>
-              <a:rPr sz="5400" b="1">
-                <a:solidFill>
-                  <a:srgbClr val="B24101"/>
-                </a:solidFill>
-                <a:latin typeface="Georgia"/>
-              </a:rPr>
-              <a:t/>
             </a:r>
           </a:p>
         </p:txBody>
@@ -6986,10 +6971,10 @@
       </p:sp>
       <p:pic>
         <p:nvPicPr>
-          <p:cNvPr id="7" name="Graphic 6">
+          <p:cNvPr id="2" name="Graphic 1">
             <a:extLst>
               <a:ext uri="{FF2B5EF4-FFF2-40B4-BE49-F238E27FC236}">
-                <a16:creationId xmlns:a16="http://schemas.microsoft.com/office/drawing/2014/main" id="{00FAF3DA-C001-AEED-1AE9-013A643EC345}"/>
+                <a16:creationId xmlns:a16="http://schemas.microsoft.com/office/drawing/2014/main" id="{82B7EA1B-924D-9A04-71C0-576FBA2D990F}"/>
               </a:ext>
             </a:extLst>
           </p:cNvPr>
@@ -7012,7 +6997,7 @@
         </p:blipFill>
         <p:spPr>
           <a:xfrm>
-            <a:off x="3393936" y="1031333"/>
+            <a:off x="3418403" y="1031333"/>
             <a:ext cx="1969737" cy="1969737"/>
           </a:xfrm>
           <a:prstGeom prst="rect">

--- a/site/public/slides/ttl-day2-active-beats-passive.pptx
+++ b/site/public/slides/ttl-day2-active-beats-passive.pptx
@@ -491,7 +491,7 @@
           </a:p>
           <a:p>
             <a:r>
-              <a:t>  Back to the ranking from the Menti tour (show the result). That's what we FEEL helps. Research puts them in an order: listening, then doing something with it, then explaining it in your own words, then working it through together. The more people do with an idea, the more they tend to learn.</a:t>
+              <a:t>  Earlier you told me what you FEEL helps (no need to go back to Menti). Research puts them in an order: listening, then doing something with it, then explaining it in your own words, then working it through together. The more people do with an idea, the more they tend to learn.</a:t>
             </a:r>
           </a:p>
           <a:p>
@@ -728,7 +728,7 @@
           </a:p>
           <a:p>
             <a:r>
-              <a:t>  DEMO live, narrating each click: sign in → new presentation → one word-cloud slide → Share → copy link.</a:t>
+              <a:t>  DEMO only if there's time (skip it otherwise: 'the steps are on your task sheet'). Click the mentimeter.com link on the slide → sign in → New presentation → one word-cloud slide → Share → copy the link. Narrate each click.</a:t>
             </a:r>
           </a:p>
         </p:txBody>
@@ -1474,7 +1474,7 @@
           </a:p>
           <a:p>
             <a:r>
-              <a:t>  Eight important clinical terms you'll need later. (Deadpan.) Three minutes. Follow the instructions on YOUR sheet.</a:t>
+              <a:t>  Eight important clinical terms you'll need later. (Deadpan.) Three minutes. Read the top of your sheet and do what it says. Both groups keep going till time's up.</a:t>
             </a:r>
           </a:p>
           <a:p>
@@ -1600,7 +1600,7 @@
           </a:p>
           <a:p>
             <a:r>
-              <a:t>  Keep the ranking result for 'Make 10 minutes active'. Don't explain it yet.</a:t>
+              <a:t>  Mention once, in passing, that this is what THEY feel helps. Don't explain the research yet, and don't reopen Menti later.</a:t>
             </a:r>
           </a:p>
           <a:p>
@@ -1691,7 +1691,7 @@
           </a:p>
           <a:p>
             <a:r>
-              <a:t>  If A wins: 're-reading FEELS better, and today it works. Watch what happens over a week.'</a:t>
+              <a:t>  If A wins: 're-reading FEELS better, and today it works. The research says that fades over days.'</a:t>
             </a:r>
           </a:p>
           <a:p>
@@ -1716,7 +1716,7 @@
           </a:p>
           <a:p>
             <a:r>
-              <a:t>  Collect the slips, names on. Keep them for Day 3.</a:t>
+              <a:t>  Then swap with a neighbour, read the answers out, they score. Slips aren't kept: Day 3 asks 'who remembers what a blorp is?' out loud.</a:t>
             </a:r>
           </a:p>
         </p:txBody>
@@ -6160,6 +6160,19 @@
                 <a:latin typeface="Aptos"/>
               </a:rPr>
               <a:t>Same steps: Computer Task Sheet</a:t>
+            </a:r>
+          </a:p>
+          <a:p>
+            <a:pPr algn="ctr"/>
+            <a:r>
+              <a:rPr sz="2800" b="0">
+                <a:solidFill>
+                  <a:srgbClr val="4C4F69"/>
+                </a:solidFill>
+                <a:latin typeface="Aptos"/>
+                <a:hlinkClick r:id="rId4"/>
+              </a:rPr>
+              <a:t>mentimeter.com</a:t>
             </a:r>
           </a:p>
         </p:txBody>
@@ -9064,25 +9077,7 @@
                 </a:solidFill>
                 <a:latin typeface="Aptos"/>
               </a:rPr>
-              <a:t>Read the list</a:t>
-            </a:r>
-            <a:r>
-              <a:rPr lang="en-GB" sz="2800" b="1" dirty="0">
-                <a:solidFill>
-                  <a:srgbClr val="4C4F69"/>
-                </a:solidFill>
-                <a:latin typeface="Aptos"/>
-              </a:rPr>
-              <a:t> (don’t fold)</a:t>
-            </a:r>
-            <a:r>
-              <a:rPr sz="2800" b="1" dirty="0">
-                <a:solidFill>
-                  <a:srgbClr val="4C4F69"/>
-                </a:solidFill>
-                <a:latin typeface="Aptos"/>
-              </a:rPr>
-              <a:t>.</a:t>
+              <a:t>Read the list.</a:t>
             </a:r>
             <a:endParaRPr lang="en-GB" sz="2800" b="1" dirty="0">
               <a:solidFill>
@@ -9100,16 +9095,7 @@
                 </a:solidFill>
                 <a:latin typeface="Aptos"/>
               </a:rPr>
-              <a:t>Read a</a:t>
-            </a:r>
-            <a:r>
-              <a:rPr sz="2800" b="1" dirty="0">
-                <a:solidFill>
-                  <a:srgbClr val="4C4F69"/>
-                </a:solidFill>
-                <a:latin typeface="Aptos"/>
-              </a:rPr>
-              <a:t>gain.</a:t>
+              <a:t>Read it again.</a:t>
             </a:r>
             <a:endParaRPr lang="en-GB" sz="2800" b="1" dirty="0">
               <a:solidFill>
@@ -9127,7 +9113,7 @@
                 </a:solidFill>
                 <a:latin typeface="Aptos"/>
               </a:rPr>
-              <a:t>And again.</a:t>
+              <a:t>Keep going till time's up.</a:t>
             </a:r>
           </a:p>
         </p:txBody>
@@ -9196,7 +9182,7 @@
                 </a:solidFill>
                 <a:latin typeface="Aptos"/>
               </a:rPr>
-              <a:t>Read once.</a:t>
+              <a:t>Read it once.</a:t>
             </a:r>
             <a:endParaRPr lang="en-GB" sz="2800" b="1" dirty="0">
               <a:solidFill>
@@ -9214,25 +9200,7 @@
                 </a:solidFill>
                 <a:latin typeface="Aptos"/>
               </a:rPr>
-              <a:t>Fold it</a:t>
-            </a:r>
-            <a:r>
-              <a:rPr lang="en-GB" sz="2800" b="1" dirty="0">
-                <a:solidFill>
-                  <a:srgbClr val="4C4F69"/>
-                </a:solidFill>
-                <a:latin typeface="Aptos"/>
-              </a:rPr>
-              <a:t>. T</a:t>
-            </a:r>
-            <a:r>
-              <a:rPr sz="2800" b="1" dirty="0">
-                <a:solidFill>
-                  <a:srgbClr val="4C4F69"/>
-                </a:solidFill>
-                <a:latin typeface="Aptos"/>
-              </a:rPr>
-              <a:t>est yourself.</a:t>
+              <a:t>Fold it. Test yourself.</a:t>
             </a:r>
             <a:endParaRPr lang="en-GB" sz="2800" b="1" dirty="0">
               <a:solidFill>
@@ -9250,7 +9218,7 @@
                 </a:solidFill>
                 <a:latin typeface="Aptos"/>
               </a:rPr>
-              <a:t>Repeat this once.</a:t>
+              <a:t>Keep testing till time's up.</a:t>
             </a:r>
             <a:endParaRPr sz="2800" b="1" dirty="0">
               <a:solidFill>
@@ -9300,7 +9268,7 @@
                 </a:solidFill>
                 <a:latin typeface="Aptos"/>
               </a:rPr>
-              <a:t>  follow the instructions on your sheet</a:t>
+              <a:t>  read the top of your sheet and do what it says</a:t>
             </a:r>
           </a:p>
         </p:txBody>

--- a/site/public/slides/ttl-day2-active-beats-passive.pptx
+++ b/site/public/slides/ttl-day2-active-beats-passive.pptx
@@ -547,6 +547,16 @@
           <a:p>
             <a:r>
               <a:t>  Circulate: what will learners be doing in minute 3? Which strategy is that, and which step on the scale?</a:t>
+            </a:r>
+          </a:p>
+          <a:p>
+            <a:r>
+              <a:t>LAST 3 MINUTES</a:t>
+            </a:r>
+          </a:p>
+          <a:p>
+            <a:r>
+              <a:t>  Copy the headline onto section 4 of the worksheet: what learners do, the strategy, where, and what they need.</a:t>
             </a:r>
           </a:p>
         </p:txBody>

--- a/site/public/slides/ttl-day2-active-beats-passive.pptx
+++ b/site/public/slides/ttl-day2-active-beats-passive.pptx
@@ -1484,7 +1484,7 @@
           </a:p>
           <a:p>
             <a:r>
-              <a:t>  Nonsense words nod to Ebbinghaus's nonsense syllables. A vs B is re-reading vs retrieval practice (Roediger &amp; Karpicke 2006). → /papers/roediger-karpicke-2006</a:t>
+              <a:t>  Nonsense words nod to Ebbinghaus's nonsense syllables. Flat vs Fold is re-reading vs retrieval practice (Roediger &amp; Karpicke 2006). → /papers/testing-beats-re-reading</a:t>
             </a:r>
           </a:p>
           <a:p>
@@ -1494,7 +1494,7 @@
           </a:p>
           <a:p>
             <a:r>
-              <a:t>  Hand out word sheets: half Version A, half Version B (alternate seats so groups mix).</a:t>
+              <a:t>  Hand out word sheets: half Flat, half Fold (alternate seats so groups mix).</a:t>
             </a:r>
           </a:p>
           <a:p>
@@ -1691,12 +1691,12 @@
           </a:p>
           <a:p>
             <a:r>
-              <a:t>  If A wins: 're-reading FEELS better, and today it works. The research says that fades over days.'</a:t>
-            </a:r>
-          </a:p>
-          <a:p>
-            <a:r>
-              <a:t>  If B wins: 'already. Now imagine a week.'</a:t>
+              <a:t>  If Flat wins: 're-reading FEELS better, and today it works. The research says that fades over days.'</a:t>
+            </a:r>
+          </a:p>
+          <a:p>
+            <a:r>
+              <a:t>  If Fold wins: 'already. Now imagine a week.'</a:t>
             </a:r>
           </a:p>
           <a:p>
@@ -1706,7 +1706,7 @@
           </a:p>
           <a:p>
             <a:r>
-              <a:t>  Hand out retest slips. Score 1 per meaning roughly right. Tally A vs B on the whiteboard.</a:t>
+              <a:t>  Hand out retest slips. Score 1 per meaning roughly right. Tally Flat vs Fold on the whiteboard.</a:t>
             </a:r>
           </a:p>
           <a:p>
@@ -9065,7 +9065,7 @@
                 </a:solidFill>
                 <a:latin typeface="Aptos"/>
               </a:rPr>
-              <a:t>Group A</a:t>
+              <a:t>Flat</a:t>
             </a:r>
           </a:p>
           <a:p>
@@ -9170,7 +9170,7 @@
                 </a:solidFill>
                 <a:latin typeface="Aptos"/>
               </a:rPr>
-              <a:t>Group B</a:t>
+              <a:t>Fold</a:t>
             </a:r>
           </a:p>
           <a:p>

--- a/site/public/slides/ttl-day2-active-beats-passive.pptx
+++ b/site/public/slides/ttl-day2-active-beats-passive.pptx
@@ -953,7 +953,7 @@
           </a:p>
           <a:p>
             <a:r>
-              <a:t>  Thank you. Bring what you made, and your blorps.</a:t>
+              <a:t>  Thank you. Bring what you made, and remember your blorps.</a:t>
             </a:r>
           </a:p>
           <a:p>

--- a/site/public/slides/ttl-day2-active-beats-passive.pptx
+++ b/site/public/slides/ttl-day2-active-beats-passive.pptx
@@ -953,7 +953,7 @@
           </a:p>
           <a:p>
             <a:r>
-              <a:t>  Thank you. Bring what you made, and your blorps.</a:t>
+              <a:t>  Thank you. Bring what you made, and remember your blorps.</a:t>
             </a:r>
           </a:p>
           <a:p>
@@ -1484,7 +1484,7 @@
           </a:p>
           <a:p>
             <a:r>
-              <a:t>  Nonsense words nod to Ebbinghaus's nonsense syllables. A vs B is re-reading vs retrieval practice (Roediger &amp; Karpicke 2006). → /papers/roediger-karpicke-2006</a:t>
+              <a:t>  Nonsense words nod to Ebbinghaus's nonsense syllables. Flat vs Fold is re-reading vs retrieval practice (Roediger &amp; Karpicke 2006). → /papers/testing-beats-re-reading</a:t>
             </a:r>
           </a:p>
           <a:p>
@@ -1494,7 +1494,7 @@
           </a:p>
           <a:p>
             <a:r>
-              <a:t>  Hand out word sheets: half Version A, half Version B (alternate seats so groups mix).</a:t>
+              <a:t>  Hand out word sheets: half Flat, half Fold (alternate seats so groups mix).</a:t>
             </a:r>
           </a:p>
           <a:p>
@@ -1691,12 +1691,12 @@
           </a:p>
           <a:p>
             <a:r>
-              <a:t>  If A wins: 're-reading FEELS better, and today it works. The research says that fades over days.'</a:t>
-            </a:r>
-          </a:p>
-          <a:p>
-            <a:r>
-              <a:t>  If B wins: 'already. Now imagine a week.'</a:t>
+              <a:t>  If Flat wins: 're-reading FEELS better, and today it works. The research says that fades over days.'</a:t>
+            </a:r>
+          </a:p>
+          <a:p>
+            <a:r>
+              <a:t>  If Fold wins: 'already. Now imagine a week.'</a:t>
             </a:r>
           </a:p>
           <a:p>
@@ -1706,7 +1706,7 @@
           </a:p>
           <a:p>
             <a:r>
-              <a:t>  Hand out retest slips. Score 1 per meaning roughly right. Tally A vs B on the whiteboard.</a:t>
+              <a:t>  Hand out retest slips. Score 1 per meaning roughly right. Tally Flat vs Fold on the whiteboard.</a:t>
             </a:r>
           </a:p>
           <a:p>
@@ -9065,7 +9065,7 @@
                 </a:solidFill>
                 <a:latin typeface="Aptos"/>
               </a:rPr>
-              <a:t>Group A</a:t>
+              <a:t>Flat</a:t>
             </a:r>
           </a:p>
           <a:p>
@@ -9170,7 +9170,7 @@
                 </a:solidFill>
                 <a:latin typeface="Aptos"/>
               </a:rPr>
-              <a:t>Group B</a:t>
+              <a:t>Fold</a:t>
             </a:r>
           </a:p>
           <a:p>
